--- a/cursos/recursos/fundamentos-del-ajedrez/01-el-tablero-y-la-notacion-algebraica.pptx
+++ b/cursos/recursos/fundamentos-del-ajedrez/01-el-tablero-y-la-notacion-algebraica.pptx
@@ -1698,7 +1698,7 @@
                 <a:ea typeface="Calibri" pitchFamily="34" charset="-122"/>
                 <a:cs typeface="Calibri" pitchFamily="34" charset="-120"/>
               </a:rPr>
-              <a:t>Cada jugada se anota con la letra de la pieza (K=rey, Q=dama, R=torre, B=alfil, N=caballo; el peón no lleva letra) seguida de la casilla de destino, por ejemplo Nf3 o e4.</a:t>
+              <a:t>Cada jugada se anota con la letra de la pieza (R = rey, D = dama, T = torre, A = alfil, C = caballo; el peón no lleva letra) seguida de la casilla de destino, por ejemplo Cf3 o e4.</a:t>
             </a:r>
             <a:endParaRPr lang="en-US" sz="1600" dirty="0"/>
           </a:p>
